--- a/dist/초2/과학/생물과변화/초2_과학_생물과변화_01_식물이자라는모습.pptx
+++ b/dist/초2/과학/생물과변화/초2_과학_생물과변화_01_식물이자라는모습.pptx
@@ -118,44 +118,44 @@
   <p:extLst>
     <p:ext uri="{521415D9-36F7-43E2-AB2F-B90AF26B5E84}">
       <p14:sectionLst xmlns:p14="http://schemas.microsoft.com/office/powerpoint/2010/main">
-        <p14:section name="도입" id="{f1b9fcf0-3431-9c77-9a4d-0b43b65a1ddb}">
+        <p14:section name="도입" id="{e4cb0ae7-1bb7-5c2d-9d85-206e6b4b96d7}">
           <p14:sldIdLst>
             <p14:sldId id="256"/>
             <p14:sldId id="257"/>
           </p14:sldIdLst>
         </p14:section>
-        <p14:section name="개념" id="{cb575a62-1500-ab26-821e-ad5cb591474c}">
+        <p14:section name="개념" id="{96094d61-2c8c-9e48-b47a-8ec348a646d2}">
           <p14:sldIdLst>
             <p14:sldId id="258"/>
             <p14:sldId id="259"/>
             <p14:sldId id="261"/>
           </p14:sldIdLst>
         </p14:section>
-        <p14:section name="연습" id="{f752e26c-62a6-23ab-fae0-63ae56f53d61}">
+        <p14:section name="연습" id="{13ddfbba-5294-8613-7ae7-85a8d5e0d5b2}">
           <p14:sldIdLst>
             <p14:sldId id="260"/>
             <p14:sldId id="262"/>
             <p14:sldId id="263"/>
           </p14:sldIdLst>
         </p14:section>
-        <p14:section name="개념" id="{9af6aff3-2aa8-d777-0d59-21f63fb82b5a}">
+        <p14:section name="개념" id="{b908368c-2f38-2882-994b-cdb805ac928d}">
           <p14:sldIdLst/>
         </p14:section>
-        <p14:section name="연습" id="{6fd213a6-dbb8-602f-dd24-889d3c386ee1}">
+        <p14:section name="연습" id="{33617b1a-16a6-b4c7-83d0-55b034ad588c}">
           <p14:sldIdLst/>
         </p14:section>
-        <p14:section name="확인" id="{e191e824-0475-d93f-21bd-8347cb3c6c57}">
+        <p14:section name="확인" id="{15b7b3b3-430b-6993-783c-ae09717710e9}">
           <p14:sldIdLst>
             <p14:sldId id="264"/>
             <p14:sldId id="265"/>
           </p14:sldIdLst>
         </p14:section>
-        <p14:section name="정리" id="{f1f36335-27e4-6cad-04ec-fe707394c5fc}">
+        <p14:section name="정리" id="{08605e7e-6f65-62fc-f045-b3976ec68bfe}">
           <p14:sldIdLst>
             <p14:sldId id="266"/>
           </p14:sldIdLst>
         </p14:section>
-        <p14:section name="보충" id="{034b975a-9589-d736-ad6e-1e3195449c19}">
+        <p14:section name="보충" id="{0269ab48-b2a6-daf1-bd06-e06079fc452c}">
           <p14:sldIdLst>
             <p14:sldId id="267"/>
           </p14:sldIdLst>
